--- a/docs/AI_PPT.pptx
+++ b/docs/AI_PPT.pptx
@@ -4189,7 +4189,7 @@
                 <a:latin typeface="Times New Roman" panose="02020603050405020304" pitchFamily="18" charset="0"/>
                 <a:cs typeface="Times New Roman" panose="02020603050405020304" pitchFamily="18" charset="0"/>
               </a:rPr>
-              <a:t>IIIT DHARWAD</a:t>
+              <a:t>IIIT DHARWAD </a:t>
             </a:r>
           </a:p>
           <a:p>
@@ -4209,6 +4209,54 @@
               </a:rPr>
               <a:t>COURSE INSTRUCTOR: DR. ANIMESH CHATURVEDI</a:t>
             </a:r>
+          </a:p>
+        </p:txBody>
+      </p:sp>
+      <p:sp>
+        <p:nvSpPr>
+          <p:cNvPr id="9" name="TextBox 8">
+            <a:extLst>
+              <a:ext uri="{FF2B5EF4-FFF2-40B4-BE49-F238E27FC236}">
+                <a16:creationId xmlns:a16="http://schemas.microsoft.com/office/drawing/2014/main" id="{B02E7637-F2F5-35AE-6F01-990AC5B2BBD3}"/>
+              </a:ext>
+            </a:extLst>
+          </p:cNvPr>
+          <p:cNvSpPr txBox="1"/>
+          <p:nvPr/>
+        </p:nvSpPr>
+        <p:spPr>
+          <a:xfrm>
+            <a:off x="176980" y="3083898"/>
+            <a:ext cx="3301930" cy="400110"/>
+          </a:xfrm>
+          <a:prstGeom prst="rect">
+            <a:avLst/>
+          </a:prstGeom>
+          <a:noFill/>
+        </p:spPr>
+        <p:txBody>
+          <a:bodyPr wrap="none" rtlCol="0">
+            <a:spAutoFit/>
+          </a:bodyPr>
+          <a:lstStyle/>
+          <a:p>
+            <a:r>
+              <a:rPr lang="en-US" sz="2000" b="1" dirty="0">
+                <a:latin typeface="Times New Roman" panose="02020603050405020304" pitchFamily="18" charset="0"/>
+                <a:cs typeface="Times New Roman" panose="02020603050405020304" pitchFamily="18" charset="0"/>
+              </a:rPr>
+              <a:t>GitHub repo: </a:t>
+            </a:r>
+            <a:r>
+              <a:rPr lang="en-IN" sz="2000" dirty="0">
+                <a:hlinkClick r:id="rId2"/>
+              </a:rPr>
+              <a:t>RK0297/Intune</a:t>
+            </a:r>
+            <a:endParaRPr lang="en-IN" sz="2000" b="1" dirty="0">
+              <a:latin typeface="Times New Roman" panose="02020603050405020304" pitchFamily="18" charset="0"/>
+              <a:cs typeface="Times New Roman" panose="02020603050405020304" pitchFamily="18" charset="0"/>
+            </a:endParaRPr>
           </a:p>
         </p:txBody>
       </p:sp>
